--- a/[SDLC] Scrum-Agile/Scrum-Agile Presentation.pptx
+++ b/[SDLC] Scrum-Agile/Scrum-Agile Presentation.pptx
@@ -3913,7 +3913,7 @@
           <a:p>
             <a:fld id="{6C7BA811-8917-4F1D-B22F-E96045BFA4E0}" type="datetimeFigureOut">
               <a:rPr lang="en-US" smtClean="0"/>
-              <a:t>8/31/2023</a:t>
+              <a:t>7/20/2024</a:t>
             </a:fld>
             <a:endParaRPr lang="en-US" dirty="0"/>
           </a:p>
@@ -17196,7 +17196,7 @@
             </a:r>
             <a:r>
               <a:rPr lang="en-US" sz="2400"/>
-              <a:t>ongoing grooming</a:t>
+              <a:t>ongoing grooming)</a:t>
             </a:r>
             <a:endParaRPr lang="en-US" sz="2400" dirty="0"/>
           </a:p>
@@ -19349,21 +19349,21 @@
 </file>
 
 <file path=customXml/item1.xml><?xml version="1.0" encoding="utf-8"?>
+<p:properties xmlns:p="http://schemas.microsoft.com/office/2006/metadata/properties" xmlns:xsi="http://www.w3.org/2001/XMLSchema-instance" xmlns:pc="http://schemas.microsoft.com/office/infopath/2007/PartnerControls">
+  <documentManagement>
+    <Status xmlns="71af3243-3dd4-4a8d-8c0d-dd76da1f02a5">Not started</Status>
+    <MediaServiceKeyPoints xmlns="71af3243-3dd4-4a8d-8c0d-dd76da1f02a5" xsi:nil="true"/>
+  </documentManagement>
+</p:properties>
+</file>
+
+<file path=customXml/item2.xml><?xml version="1.0" encoding="utf-8"?>
 <?mso-contentType ?>
 <FormTemplates xmlns="http://schemas.microsoft.com/sharepoint/v3/contenttype/forms">
   <Display>DocumentLibraryForm</Display>
   <Edit>DocumentLibraryForm</Edit>
   <New>DocumentLibraryForm</New>
 </FormTemplates>
-</file>
-
-<file path=customXml/item2.xml><?xml version="1.0" encoding="utf-8"?>
-<p:properties xmlns:p="http://schemas.microsoft.com/office/2006/metadata/properties" xmlns:xsi="http://www.w3.org/2001/XMLSchema-instance" xmlns:pc="http://schemas.microsoft.com/office/infopath/2007/PartnerControls">
-  <documentManagement>
-    <Status xmlns="71af3243-3dd4-4a8d-8c0d-dd76da1f02a5">Not started</Status>
-    <MediaServiceKeyPoints xmlns="71af3243-3dd4-4a8d-8c0d-dd76da1f02a5" xsi:nil="true"/>
-  </documentManagement>
-</p:properties>
 </file>
 
 <file path=customXml/item3.xml><?xml version="1.0" encoding="utf-8"?>
@@ -19588,14 +19588,6 @@
 </file>
 
 <file path=customXml/itemProps1.xml><?xml version="1.0" encoding="utf-8"?>
-<ds:datastoreItem xmlns:ds="http://schemas.openxmlformats.org/officeDocument/2006/customXml" ds:itemID="{1A449C04-64B3-4403-94B7-8D2284C38D1B}">
-  <ds:schemaRefs>
-    <ds:schemaRef ds:uri="http://schemas.microsoft.com/sharepoint/v3/contenttype/forms"/>
-  </ds:schemaRefs>
-</ds:datastoreItem>
-</file>
-
-<file path=customXml/itemProps2.xml><?xml version="1.0" encoding="utf-8"?>
 <ds:datastoreItem xmlns:ds="http://schemas.openxmlformats.org/officeDocument/2006/customXml" ds:itemID="{FBDEF148-1770-458F-8F5B-C3D0A278AA97}">
   <ds:schemaRefs>
     <ds:schemaRef ds:uri="http://schemas.microsoft.com/office/infopath/2007/PartnerControls"/>
@@ -19608,6 +19600,14 @@
     <ds:schemaRef ds:uri="http://purl.org/dc/terms/"/>
     <ds:schemaRef ds:uri="16c05727-aa75-4e4a-9b5f-8a80a1165891"/>
     <ds:schemaRef ds:uri="http://purl.org/dc/dcmitype/"/>
+  </ds:schemaRefs>
+</ds:datastoreItem>
+</file>
+
+<file path=customXml/itemProps2.xml><?xml version="1.0" encoding="utf-8"?>
+<ds:datastoreItem xmlns:ds="http://schemas.openxmlformats.org/officeDocument/2006/customXml" ds:itemID="{1A449C04-64B3-4403-94B7-8D2284C38D1B}">
+  <ds:schemaRefs>
+    <ds:schemaRef ds:uri="http://schemas.microsoft.com/sharepoint/v3/contenttype/forms"/>
   </ds:schemaRefs>
 </ds:datastoreItem>
 </file>
